--- a/10/ppt/10-1_API와_요청·응답_이해하기_v1.pptx
+++ b/10/ppt/10-1_API와_요청·응답_이해하기_v1.pptx
@@ -8726,7 +8726,7 @@
                 <a:ea typeface="IBM Plex Sans KR" pitchFamily="34" charset="-122"/>
                 <a:cs typeface="IBM Plex Sans KR" pitchFamily="34" charset="-120"/>
               </a:rPr>
-              <a:t>아무 데나 말을 걸 수 없고 정해진 자리로만 요청한다. 그 자리가 주소다.</a:t>
+              <a:t>아무 데나 말을 걸 수 없고 정해진 자리로만 요청한다. 그 자리가 주소다. 교과서 3쪽 그림을 함께 본다.</a:t>
             </a:r>
             <a:endParaRPr lang="en-US" sz="1350" dirty="0"/>
           </a:p>

--- a/10/ppt/10-1_API와_요청·응답_이해하기_v1.pptx
+++ b/10/ppt/10-1_API와_요청·응답_이해하기_v1.pptx
@@ -5611,7 +5611,7 @@
                 <a:ea typeface="IBM Plex Sans KR" pitchFamily="34" charset="-122"/>
                 <a:cs typeface="IBM Plex Sans KR" pitchFamily="34" charset="-120"/>
               </a:rPr>
-              <a:t>외부 API와 학생 개인 API 키</a:t>
+              <a:t>외부 API와 개인 API 키</a:t>
             </a:r>
             <a:endParaRPr lang="en-US" sz="1300" dirty="0"/>
           </a:p>
